--- a/progetto-snodi/corsi/ethic-ai-2/incontri/E05-red-teaming-fact-checking.pptx
+++ b/progetto-snodi/corsi/ethic-ai-2/incontri/E05-red-teaming-fact-checking.pptx
@@ -13,9 +13,10 @@
     <p:sldId id="261" r:id="rId7"/>
     <p:sldId id="262" r:id="rId8"/>
     <p:sldId id="263" r:id="rId9"/>
+    <p:sldId id="264" r:id="rId10"/>
   </p:sldIdLst>
   <p:notesMasterIdLst>
-    <p:notesMasterId r:id="rId10"/>
+    <p:notesMasterId r:id="rId11"/>
   </p:notesMasterIdLst>
   <p:sldSz cx="12188952" cy="6858000"/>
   <p:notesSz cx="6858000" cy="12188952"/>
@@ -949,7 +950,7 @@
           <a:p>
             <a:r>
               <a:rPr lang="en-US" dirty="0"/>
-              <a:t>Il momento in cui il corso si salda: il red-teaming diventa attività concreta della UdA del project work. Valorizzare in restituzione i casi in cui la controprova ha smentito: è l'anti-cherry-picking vissuto.</a:t>
+              <a:t>Demo consigliata prima del laboratorio: l'anti-sycophancy applicato alla trappola già vista all'incontro 3 (prima/dopo). Capsula Panai qui: 'quello che state facendo è, in miniatura, il mestiere dell'eticista dell'IA — esiste, e qualcuno dei vostri studenti potrebbe farlo'. Chiudere con il principio finale della slide, che riprende Antiqua et Nova: la funzionalità si orchestra, il giudizio si forma.</a:t>
             </a:r>
             <a:endParaRPr lang="en-US" dirty="0"/>
           </a:p>
@@ -1037,7 +1038,7 @@
           <a:p>
             <a:r>
               <a:rPr lang="en-US" dirty="0"/>
-              <a:t>Bussola breve: l'incontro è già denso. La frase del pannello è il takeaway dell'intera giornata.</a:t>
+              <a:t>Il momento in cui il corso si salda: il red-teaming diventa attività concreta della UdA del project work. Valorizzare in restituzione i casi in cui la controprova ha smentito: è l'anti-cherry-picking vissuto.</a:t>
             </a:r>
             <a:endParaRPr lang="en-US" dirty="0"/>
           </a:p>
@@ -1125,7 +1126,7 @@
           <a:p>
             <a:r>
               <a:rPr lang="en-US" dirty="0"/>
-              <a:t>Una settimana per completare: promemoria giovedì. La consegna include l'attività sviluppata, non solo il canvas: verificarlo nel promemoria.</a:t>
+              <a:t>Bussola breve: l'incontro è già denso. La frase del pannello è il takeaway dell'intera giornata.</a:t>
             </a:r>
             <a:endParaRPr lang="en-US" dirty="0"/>
           </a:p>
@@ -1149,6 +1150,94 @@
             <a:fld id="{F7021451-1387-4CA6-816F-3879F97B5CBC}" type="slidenum">
               <a:rPr lang="en-US"/>
               <a:t>8</a:t>
+            </a:fld>
+            <a:endParaRPr lang="en-US"/>
+          </a:p>
+        </p:txBody>
+      </p:sp>
+    </p:spTree>
+    <p:extLst>
+      <p:ext uri="{BB962C8B-B14F-4D97-AF65-F5344CB8AC3E}">
+        <p14:creationId xmlns:p14="http://schemas.microsoft.com/office/powerpoint/2010/main" val="1024086991"/>
+      </p:ext>
+    </p:extLst>
+  </p:cSld>
+  <p:clrMapOvr>
+    <a:masterClrMapping/>
+  </p:clrMapOvr>
+</p:notes>
+</file>
+
+<file path=ppt/notesSlides/notesSlide9.xml><?xml version="1.0" encoding="utf-8"?>
+<p:notes xmlns:a="http://schemas.openxmlformats.org/drawingml/2006/main" xmlns:r="http://schemas.openxmlformats.org/officeDocument/2006/relationships" xmlns:p="http://schemas.openxmlformats.org/presentationml/2006/main">
+  <p:cSld>
+    <p:spTree>
+      <p:nvGrpSpPr>
+        <p:cNvPr id="1" name=""/>
+        <p:cNvGrpSpPr/>
+        <p:nvPr/>
+      </p:nvGrpSpPr>
+      <p:grpSpPr>
+        <a:xfrm>
+          <a:off x="0" y="0"/>
+          <a:ext cx="0" cy="0"/>
+          <a:chOff x="0" y="0"/>
+          <a:chExt cx="0" cy="0"/>
+        </a:xfrm>
+      </p:grpSpPr>
+      <p:sp>
+        <p:nvSpPr>
+          <p:cNvPr id="2" name="Slide Image Placeholder 1"/>
+          <p:cNvSpPr>
+            <a:spLocks noGrp="1" noRot="1" noChangeAspect="1"/>
+          </p:cNvSpPr>
+          <p:nvPr>
+            <p:ph type="sldImg"/>
+          </p:nvPr>
+        </p:nvSpPr>
+        <p:spPr/>
+      </p:sp>
+      <p:sp>
+        <p:nvSpPr>
+          <p:cNvPr id="3" name="Notes Placeholder 2"/>
+          <p:cNvSpPr>
+            <a:spLocks noGrp="1"/>
+          </p:cNvSpPr>
+          <p:nvPr>
+            <p:ph type="body" idx="1"/>
+          </p:nvPr>
+        </p:nvSpPr>
+        <p:spPr/>
+        <p:txBody>
+          <a:bodyPr/>
+          <a:lstStyle/>
+          <a:p>
+            <a:r>
+              <a:rPr lang="en-US" dirty="0"/>
+              <a:t>Una settimana per completare: promemoria giovedì. La consegna include l'attività sviluppata, non solo il canvas: verificarlo nel promemoria.</a:t>
+            </a:r>
+            <a:endParaRPr lang="en-US" dirty="0"/>
+          </a:p>
+        </p:txBody>
+      </p:sp>
+      <p:sp>
+        <p:nvSpPr>
+          <p:cNvPr id="4" name="Slide Number Placeholder 3"/>
+          <p:cNvSpPr>
+            <a:spLocks noGrp="1"/>
+          </p:cNvSpPr>
+          <p:nvPr>
+            <p:ph type="sldNum" sz="quarter" idx="10"/>
+          </p:nvPr>
+        </p:nvSpPr>
+        <p:spPr/>
+        <p:txBody>
+          <a:bodyPr/>
+          <a:lstStyle/>
+          <a:p>
+            <a:fld id="{F7021451-1387-4CA6-816F-3879F97B5CBC}" type="slidenum">
+              <a:rPr lang="en-US"/>
+              <a:t>9</a:t>
             </a:fld>
             <a:endParaRPr lang="en-US"/>
           </a:p>
@@ -4262,7 +4351,7 @@
                 <a:ea typeface="Calibri" pitchFamily="34" charset="-122"/>
                 <a:cs typeface="Calibri" pitchFamily="34" charset="-120"/>
               </a:rPr>
-              <a:t>Esercitazione — mani sulla tastiera</a:t>
+              <a:t>Ethic-AI 2 — Etica, Bias e Cittadinanza nell'era dell'IA</a:t>
             </a:r>
             <a:endParaRPr lang="en-US" sz="1100" dirty="0"/>
           </a:p>
@@ -4301,7 +4390,7 @@
                 <a:ea typeface="Cambria" pitchFamily="34" charset="-122"/>
                 <a:cs typeface="Cambria" pitchFamily="34" charset="-120"/>
               </a:rPr>
-              <a:t>Laboratorio: bias audit sulla vostra UdA</a:t>
+              <a:t>Prompt etici e di controllo</a:t>
             </a:r>
             <a:endParaRPr lang="en-US" sz="3000" dirty="0"/>
           </a:p>
@@ -4309,18 +4398,166 @@
       </p:sp>
       <p:sp>
         <p:nvSpPr>
-          <p:cNvPr id="6" name="Shape 4"/>
+          <p:cNvPr id="6" name="Text 4"/>
           <p:cNvSpPr/>
           <p:nvPr/>
         </p:nvSpPr>
         <p:spPr>
           <a:xfrm>
             <a:off x="822960" y="1600200"/>
-            <a:ext cx="7315200" cy="4572000"/>
+            <a:ext cx="6492240" cy="4754880"/>
+          </a:xfrm>
+          <a:prstGeom prst="rect">
+            <a:avLst/>
+          </a:prstGeom>
+          <a:noFill/>
+          <a:ln/>
+        </p:spPr>
+        <p:txBody>
+          <a:bodyPr wrap="square" lIns="0" tIns="0" rIns="0" bIns="0" rtlCol="0" anchor="t"/>
+          <a:lstStyle/>
+          <a:p>
+            <a:pPr marL="177800" indent="-177800">
+              <a:spcAft>
+                <a:spcPts val="800"/>
+              </a:spcAft>
+              <a:buSzPct val="100000"/>
+              <a:buChar char="•"/>
+            </a:pPr>
+            <a:r>
+              <a:rPr lang="en-US" sz="1500" b="1" dirty="0">
+                <a:solidFill>
+                  <a:srgbClr val="26303B"/>
+                </a:solidFill>
+                <a:latin typeface="Calibri" pitchFamily="34" charset="0"/>
+                <a:ea typeface="Calibri" pitchFamily="34" charset="-122"/>
+                <a:cs typeface="Calibri" pitchFamily="34" charset="-120"/>
+              </a:rPr>
+              <a:t>Il tribunale dei framework: stesso dilemma valutato tre volte — deontologia, conseguenze, virtù. L'IA apparecchia il dibattito, gli studenti giudicano</a:t>
+            </a:r>
+            <a:endParaRPr lang="en-US" sz="1500" dirty="0"/>
+          </a:p>
+          <a:p>
+            <a:pPr marL="177800" indent="-177800">
+              <a:spcAft>
+                <a:spcPts val="800"/>
+              </a:spcAft>
+              <a:buSzPct val="100000"/>
+              <a:buChar char="•"/>
+            </a:pPr>
+            <a:r>
+              <a:rPr lang="en-US" sz="1500" b="1" dirty="0">
+                <a:solidFill>
+                  <a:srgbClr val="26303B"/>
+                </a:solidFill>
+                <a:latin typeface="Calibri" pitchFamily="34" charset="0"/>
+                <a:ea typeface="Calibri" pitchFamily="34" charset="-122"/>
+                <a:cs typeface="Calibri" pitchFamily="34" charset="-120"/>
+              </a:rPr>
+              <a:t>Il prompt 'costituzionale': valutare un caso alla luce dei sei principi del Rome Call (o dell'art. 3 Cost.) — l'algoretica in esercizio</a:t>
+            </a:r>
+            <a:endParaRPr lang="en-US" sz="1500" dirty="0"/>
+          </a:p>
+          <a:p>
+            <a:pPr marL="177800" indent="-177800">
+              <a:spcAft>
+                <a:spcPts val="800"/>
+              </a:spcAft>
+              <a:buSzPct val="100000"/>
+              <a:buChar char="•"/>
+            </a:pPr>
+            <a:r>
+              <a:rPr lang="en-US" sz="1500" b="1" dirty="0">
+                <a:solidFill>
+                  <a:srgbClr val="26303B"/>
+                </a:solidFill>
+                <a:latin typeface="Calibri" pitchFamily="34" charset="0"/>
+                <a:ea typeface="Calibri" pitchFamily="34" charset="-122"/>
+                <a:cs typeface="Calibri" pitchFamily="34" charset="-120"/>
+              </a:rPr>
+              <a:t>L'anti-sycophancy: 'ignora la mia premessa, dammi il miglior PRO e il miglior CONTRO con pari cura' — lo scudo contro la compiacenza</a:t>
+            </a:r>
+            <a:endParaRPr lang="en-US" sz="1500" dirty="0"/>
+          </a:p>
+          <a:p>
+            <a:pPr marL="177800" indent="-177800">
+              <a:spcAft>
+                <a:spcPts val="800"/>
+              </a:spcAft>
+              <a:buSzPct val="100000"/>
+              <a:buChar char="•"/>
+            </a:pPr>
+            <a:r>
+              <a:rPr lang="en-US" sz="1500" b="1" dirty="0">
+                <a:solidFill>
+                  <a:srgbClr val="26303B"/>
+                </a:solidFill>
+                <a:latin typeface="Calibri" pitchFamily="34" charset="0"/>
+                <a:ea typeface="Calibri" pitchFamily="34" charset="-122"/>
+                <a:cs typeface="Calibri" pitchFamily="34" charset="-120"/>
+              </a:rPr>
+              <a:t>L'autocritica forzata: 'rileggi la tua risposta da revisore severo: fatti verificabili? bias? punto debole?' — la prima risposta è sempre una bozza</a:t>
+            </a:r>
+            <a:endParaRPr lang="en-US" sz="1500" dirty="0"/>
+          </a:p>
+          <a:p>
+            <a:pPr marL="177800" indent="-177800">
+              <a:spcAft>
+                <a:spcPts val="800"/>
+              </a:spcAft>
+              <a:buSzPct val="100000"/>
+              <a:buChar char="•"/>
+            </a:pPr>
+            <a:r>
+              <a:rPr lang="en-US" sz="1500" dirty="0">
+                <a:solidFill>
+                  <a:srgbClr val="26303B"/>
+                </a:solidFill>
+                <a:latin typeface="Calibri" pitchFamily="34" charset="0"/>
+                <a:ea typeface="Calibri" pitchFamily="34" charset="-122"/>
+                <a:cs typeface="Calibri" pitchFamily="34" charset="-120"/>
+              </a:rPr>
+              <a:t>Il guardrail di sistema per i Gems: regole etiche permanenti scritte nelle istruzioni — e mostrarle agli studenti È educazione alla trasparenza</a:t>
+            </a:r>
+            <a:endParaRPr lang="en-US" sz="1500" dirty="0"/>
+          </a:p>
+          <a:p>
+            <a:pPr marL="177800" indent="-177800">
+              <a:spcAft>
+                <a:spcPts val="800"/>
+              </a:spcAft>
+              <a:buSzPct val="100000"/>
+              <a:buChar char="•"/>
+            </a:pPr>
+            <a:r>
+              <a:rPr lang="en-US" sz="1500" b="1" dirty="0">
+                <a:solidFill>
+                  <a:srgbClr val="26303B"/>
+                </a:solidFill>
+                <a:latin typeface="Calibri" pitchFamily="34" charset="0"/>
+                <a:ea typeface="Calibri" pitchFamily="34" charset="-122"/>
+                <a:cs typeface="Calibri" pitchFamily="34" charset="-120"/>
+              </a:rPr>
+              <a:t>Il principio: questi prompt non rendono l'IA etica — spostano il lavoro etico nel progetto della domanda e nella verifica della risposta</a:t>
+            </a:r>
+            <a:endParaRPr lang="en-US" sz="1500" dirty="0"/>
+          </a:p>
+        </p:txBody>
+      </p:sp>
+      <p:sp>
+        <p:nvSpPr>
+          <p:cNvPr id="7" name="Shape 5"/>
+          <p:cNvSpPr/>
+          <p:nvPr/>
+        </p:nvSpPr>
+        <p:spPr>
+          <a:xfrm>
+            <a:off x="7635240" y="1600200"/>
+            <a:ext cx="3977640" cy="4480560"/>
           </a:xfrm>
           <a:prstGeom prst="roundRect">
             <a:avLst>
-              <a:gd name="adj" fmla="val 1800"/>
+              <a:gd name="adj" fmla="val 2069"/>
             </a:avLst>
           </a:prstGeom>
           <a:solidFill>
@@ -4336,39 +4573,14 @@
       </p:sp>
       <p:sp>
         <p:nvSpPr>
-          <p:cNvPr id="7" name="Shape 5"/>
-          <p:cNvSpPr/>
-          <p:nvPr/>
-        </p:nvSpPr>
-        <p:spPr>
-          <a:xfrm>
-            <a:off x="1051560" y="1828800"/>
-            <a:ext cx="384048" cy="384048"/>
-          </a:xfrm>
-          <a:prstGeom prst="ellipse">
-            <a:avLst/>
-          </a:prstGeom>
-          <a:solidFill>
-            <a:srgbClr val="1E2761"/>
-          </a:solidFill>
-          <a:ln w="12700">
-            <a:solidFill>
-              <a:srgbClr val="1E2761"/>
-            </a:solidFill>
-            <a:prstDash val="solid"/>
-          </a:ln>
-        </p:spPr>
-      </p:sp>
-      <p:sp>
-        <p:nvSpPr>
           <p:cNvPr id="8" name="Text 6"/>
           <p:cNvSpPr/>
           <p:nvPr/>
         </p:nvSpPr>
         <p:spPr>
           <a:xfrm>
-            <a:off x="1051560" y="1828800"/>
-            <a:ext cx="384048" cy="384048"/>
+            <a:off x="7863840" y="1764792"/>
+            <a:ext cx="3520440" cy="320040"/>
           </a:xfrm>
           <a:prstGeom prst="rect">
             <a:avLst/>
@@ -4380,21 +4592,21 @@
           <a:bodyPr wrap="square" lIns="0" tIns="0" rIns="0" bIns="0" rtlCol="0" anchor="ctr"/>
           <a:lstStyle/>
           <a:p>
-            <a:pPr algn="ctr" indent="0" marL="0">
-              <a:buNone/>
-            </a:pPr>
-            <a:r>
-              <a:rPr lang="en-US" sz="1300" b="1" dirty="0">
-                <a:solidFill>
-                  <a:srgbClr val="FFFFFF"/>
+            <a:pPr indent="0" marL="0">
+              <a:buNone/>
+            </a:pPr>
+            <a:r>
+              <a:rPr lang="en-US" sz="1450" b="1" dirty="0">
+                <a:solidFill>
+                  <a:srgbClr val="1E2761"/>
                 </a:solidFill>
                 <a:latin typeface="Cambria" pitchFamily="34" charset="0"/>
                 <a:ea typeface="Cambria" pitchFamily="34" charset="-122"/>
                 <a:cs typeface="Cambria" pitchFamily="34" charset="-120"/>
               </a:rPr>
-              <a:t>1</a:t>
-            </a:r>
-            <a:endParaRPr lang="en-US" sz="1300" dirty="0"/>
+              <a:t>Ora, nel laboratorio</a:t>
+            </a:r>
+            <a:endParaRPr lang="en-US" sz="1450" dirty="0"/>
           </a:p>
         </p:txBody>
       </p:sp>
@@ -4406,525 +4618,8 @@
         </p:nvSpPr>
         <p:spPr>
           <a:xfrm>
-            <a:off x="1600200" y="1783080"/>
-            <a:ext cx="6309360" cy="777240"/>
-          </a:xfrm>
-          <a:prstGeom prst="rect">
-            <a:avLst/>
-          </a:prstGeom>
-          <a:noFill/>
-          <a:ln/>
-        </p:spPr>
-        <p:txBody>
-          <a:bodyPr wrap="square" lIns="0" tIns="0" rIns="0" bIns="0" rtlCol="0" anchor="t"/>
-          <a:lstStyle/>
-          <a:p>
-            <a:pPr indent="0" marL="0">
-              <a:buNone/>
-            </a:pPr>
-            <a:r>
-              <a:rPr lang="en-US" sz="1350" dirty="0">
-                <a:solidFill>
-                  <a:srgbClr val="26303B"/>
-                </a:solidFill>
-                <a:latin typeface="Calibri" pitchFamily="34" charset="0"/>
-                <a:ea typeface="Calibri" pitchFamily="34" charset="-122"/>
-                <a:cs typeface="Calibri" pitchFamily="34" charset="-120"/>
-              </a:rPr>
-              <a:t>In gruppi di 3: scegliete una UdA del gruppo e progettate il red-teaming per QUELLA classe — ipotesi di bias pertinente al tema (protocollo in 5 passi, scheda E5)</a:t>
-            </a:r>
-            <a:endParaRPr lang="en-US" sz="1350" dirty="0"/>
-          </a:p>
-        </p:txBody>
-      </p:sp>
-      <p:sp>
-        <p:nvSpPr>
-          <p:cNvPr id="10" name="Shape 8"/>
-          <p:cNvSpPr/>
-          <p:nvPr/>
-        </p:nvSpPr>
-        <p:spPr>
-          <a:xfrm>
-            <a:off x="1051560" y="2670048"/>
-            <a:ext cx="384048" cy="384048"/>
-          </a:xfrm>
-          <a:prstGeom prst="ellipse">
-            <a:avLst/>
-          </a:prstGeom>
-          <a:solidFill>
-            <a:srgbClr val="1E2761"/>
-          </a:solidFill>
-          <a:ln w="12700">
-            <a:solidFill>
-              <a:srgbClr val="1E2761"/>
-            </a:solidFill>
-            <a:prstDash val="solid"/>
-          </a:ln>
-        </p:spPr>
-      </p:sp>
-      <p:sp>
-        <p:nvSpPr>
-          <p:cNvPr id="11" name="Text 9"/>
-          <p:cNvSpPr/>
-          <p:nvPr/>
-        </p:nvSpPr>
-        <p:spPr>
-          <a:xfrm>
-            <a:off x="1051560" y="2670048"/>
-            <a:ext cx="384048" cy="384048"/>
-          </a:xfrm>
-          <a:prstGeom prst="rect">
-            <a:avLst/>
-          </a:prstGeom>
-          <a:noFill/>
-          <a:ln/>
-        </p:spPr>
-        <p:txBody>
-          <a:bodyPr wrap="square" lIns="0" tIns="0" rIns="0" bIns="0" rtlCol="0" anchor="ctr"/>
-          <a:lstStyle/>
-          <a:p>
-            <a:pPr algn="ctr" indent="0" marL="0">
-              <a:buNone/>
-            </a:pPr>
-            <a:r>
-              <a:rPr lang="en-US" sz="1300" b="1" dirty="0">
-                <a:solidFill>
-                  <a:srgbClr val="FFFFFF"/>
-                </a:solidFill>
-                <a:latin typeface="Cambria" pitchFamily="34" charset="0"/>
-                <a:ea typeface="Cambria" pitchFamily="34" charset="-122"/>
-                <a:cs typeface="Cambria" pitchFamily="34" charset="-120"/>
-              </a:rPr>
-              <a:t>2</a:t>
-            </a:r>
-            <a:endParaRPr lang="en-US" sz="1300" dirty="0"/>
-          </a:p>
-        </p:txBody>
-      </p:sp>
-      <p:sp>
-        <p:nvSpPr>
-          <p:cNvPr id="12" name="Text 10"/>
-          <p:cNvSpPr/>
-          <p:nvPr/>
-        </p:nvSpPr>
-        <p:spPr>
-          <a:xfrm>
-            <a:off x="1600200" y="2624328"/>
-            <a:ext cx="6309360" cy="777240"/>
-          </a:xfrm>
-          <a:prstGeom prst="rect">
-            <a:avLst/>
-          </a:prstGeom>
-          <a:noFill/>
-          <a:ln/>
-        </p:spPr>
-        <p:txBody>
-          <a:bodyPr wrap="square" lIns="0" tIns="0" rIns="0" bIns="0" rtlCol="0" anchor="t"/>
-          <a:lstStyle/>
-          <a:p>
-            <a:pPr indent="0" marL="0">
-              <a:buNone/>
-            </a:pPr>
-            <a:r>
-              <a:rPr lang="en-US" sz="1350" dirty="0">
-                <a:solidFill>
-                  <a:srgbClr val="26303B"/>
-                </a:solidFill>
-                <a:latin typeface="Calibri" pitchFamily="34" charset="0"/>
-                <a:ea typeface="Calibri" pitchFamily="34" charset="-122"/>
-                <a:cs typeface="Calibri" pitchFamily="34" charset="-120"/>
-              </a:rPr>
-              <a:t>Eseguite l'audit voi stessi su Gemini: almeno 3 probe con varianti e una controprova; registrate gli esiti in tabella</a:t>
-            </a:r>
-            <a:endParaRPr lang="en-US" sz="1350" dirty="0"/>
-          </a:p>
-        </p:txBody>
-      </p:sp>
-      <p:sp>
-        <p:nvSpPr>
-          <p:cNvPr id="13" name="Shape 11"/>
-          <p:cNvSpPr/>
-          <p:nvPr/>
-        </p:nvSpPr>
-        <p:spPr>
-          <a:xfrm>
-            <a:off x="1051560" y="3511296"/>
-            <a:ext cx="384048" cy="384048"/>
-          </a:xfrm>
-          <a:prstGeom prst="ellipse">
-            <a:avLst/>
-          </a:prstGeom>
-          <a:solidFill>
-            <a:srgbClr val="1E2761"/>
-          </a:solidFill>
-          <a:ln w="12700">
-            <a:solidFill>
-              <a:srgbClr val="1E2761"/>
-            </a:solidFill>
-            <a:prstDash val="solid"/>
-          </a:ln>
-        </p:spPr>
-      </p:sp>
-      <p:sp>
-        <p:nvSpPr>
-          <p:cNvPr id="14" name="Text 12"/>
-          <p:cNvSpPr/>
-          <p:nvPr/>
-        </p:nvSpPr>
-        <p:spPr>
-          <a:xfrm>
-            <a:off x="1051560" y="3511296"/>
-            <a:ext cx="384048" cy="384048"/>
-          </a:xfrm>
-          <a:prstGeom prst="rect">
-            <a:avLst/>
-          </a:prstGeom>
-          <a:noFill/>
-          <a:ln/>
-        </p:spPr>
-        <p:txBody>
-          <a:bodyPr wrap="square" lIns="0" tIns="0" rIns="0" bIns="0" rtlCol="0" anchor="ctr"/>
-          <a:lstStyle/>
-          <a:p>
-            <a:pPr algn="ctr" indent="0" marL="0">
-              <a:buNone/>
-            </a:pPr>
-            <a:r>
-              <a:rPr lang="en-US" sz="1300" b="1" dirty="0">
-                <a:solidFill>
-                  <a:srgbClr val="FFFFFF"/>
-                </a:solidFill>
-                <a:latin typeface="Cambria" pitchFamily="34" charset="0"/>
-                <a:ea typeface="Cambria" pitchFamily="34" charset="-122"/>
-                <a:cs typeface="Cambria" pitchFamily="34" charset="-120"/>
-              </a:rPr>
-              <a:t>3</a:t>
-            </a:r>
-            <a:endParaRPr lang="en-US" sz="1300" dirty="0"/>
-          </a:p>
-        </p:txBody>
-      </p:sp>
-      <p:sp>
-        <p:nvSpPr>
-          <p:cNvPr id="15" name="Text 13"/>
-          <p:cNvSpPr/>
-          <p:nvPr/>
-        </p:nvSpPr>
-        <p:spPr>
-          <a:xfrm>
-            <a:off x="1600200" y="3465576"/>
-            <a:ext cx="6309360" cy="777240"/>
-          </a:xfrm>
-          <a:prstGeom prst="rect">
-            <a:avLst/>
-          </a:prstGeom>
-          <a:noFill/>
-          <a:ln/>
-        </p:spPr>
-        <p:txBody>
-          <a:bodyPr wrap="square" lIns="0" tIns="0" rIns="0" bIns="0" rtlCol="0" anchor="t"/>
-          <a:lstStyle/>
-          <a:p>
-            <a:pPr indent="0" marL="0">
-              <a:buNone/>
-            </a:pPr>
-            <a:r>
-              <a:rPr lang="en-US" sz="1350" dirty="0">
-                <a:solidFill>
-                  <a:srgbClr val="26303B"/>
-                </a:solidFill>
-                <a:latin typeface="Calibri" pitchFamily="34" charset="0"/>
-                <a:ea typeface="Calibri" pitchFamily="34" charset="-122"/>
-                <a:cs typeface="Calibri" pitchFamily="34" charset="-120"/>
-              </a:rPr>
-              <a:t>Scrivete il 'rapporto': cosa avete trovato, con che confidenza, cosa non potete concludere</a:t>
-            </a:r>
-            <a:endParaRPr lang="en-US" sz="1350" dirty="0"/>
-          </a:p>
-        </p:txBody>
-      </p:sp>
-      <p:sp>
-        <p:nvSpPr>
-          <p:cNvPr id="16" name="Shape 14"/>
-          <p:cNvSpPr/>
-          <p:nvPr/>
-        </p:nvSpPr>
-        <p:spPr>
-          <a:xfrm>
-            <a:off x="1051560" y="4352544"/>
-            <a:ext cx="384048" cy="384048"/>
-          </a:xfrm>
-          <a:prstGeom prst="ellipse">
-            <a:avLst/>
-          </a:prstGeom>
-          <a:solidFill>
-            <a:srgbClr val="1E2761"/>
-          </a:solidFill>
-          <a:ln w="12700">
-            <a:solidFill>
-              <a:srgbClr val="1E2761"/>
-            </a:solidFill>
-            <a:prstDash val="solid"/>
-          </a:ln>
-        </p:spPr>
-      </p:sp>
-      <p:sp>
-        <p:nvSpPr>
-          <p:cNvPr id="17" name="Text 15"/>
-          <p:cNvSpPr/>
-          <p:nvPr/>
-        </p:nvSpPr>
-        <p:spPr>
-          <a:xfrm>
-            <a:off x="1051560" y="4352544"/>
-            <a:ext cx="384048" cy="384048"/>
-          </a:xfrm>
-          <a:prstGeom prst="rect">
-            <a:avLst/>
-          </a:prstGeom>
-          <a:noFill/>
-          <a:ln/>
-        </p:spPr>
-        <p:txBody>
-          <a:bodyPr wrap="square" lIns="0" tIns="0" rIns="0" bIns="0" rtlCol="0" anchor="ctr"/>
-          <a:lstStyle/>
-          <a:p>
-            <a:pPr algn="ctr" indent="0" marL="0">
-              <a:buNone/>
-            </a:pPr>
-            <a:r>
-              <a:rPr lang="en-US" sz="1300" b="1" dirty="0">
-                <a:solidFill>
-                  <a:srgbClr val="FFFFFF"/>
-                </a:solidFill>
-                <a:latin typeface="Cambria" pitchFamily="34" charset="0"/>
-                <a:ea typeface="Cambria" pitchFamily="34" charset="-122"/>
-                <a:cs typeface="Cambria" pitchFamily="34" charset="-120"/>
-              </a:rPr>
-              <a:t>4</a:t>
-            </a:r>
-            <a:endParaRPr lang="en-US" sz="1300" dirty="0"/>
-          </a:p>
-        </p:txBody>
-      </p:sp>
-      <p:sp>
-        <p:nvSpPr>
-          <p:cNvPr id="18" name="Text 16"/>
-          <p:cNvSpPr/>
-          <p:nvPr/>
-        </p:nvSpPr>
-        <p:spPr>
-          <a:xfrm>
-            <a:off x="1600200" y="4306824"/>
-            <a:ext cx="6309360" cy="777240"/>
-          </a:xfrm>
-          <a:prstGeom prst="rect">
-            <a:avLst/>
-          </a:prstGeom>
-          <a:noFill/>
-          <a:ln/>
-        </p:spPr>
-        <p:txBody>
-          <a:bodyPr wrap="square" lIns="0" tIns="0" rIns="0" bIns="0" rtlCol="0" anchor="t"/>
-          <a:lstStyle/>
-          <a:p>
-            <a:pPr indent="0" marL="0">
-              <a:buNone/>
-            </a:pPr>
-            <a:r>
-              <a:rPr lang="en-US" sz="1350" dirty="0">
-                <a:solidFill>
-                  <a:srgbClr val="26303B"/>
-                </a:solidFill>
-                <a:latin typeface="Calibri" pitchFamily="34" charset="0"/>
-                <a:ea typeface="Calibri" pitchFamily="34" charset="-122"/>
-                <a:cs typeface="Calibri" pitchFamily="34" charset="-120"/>
-              </a:rPr>
-              <a:t>Definite i ruoli per la classe (red/blue/giuria) e il prodotto atteso dagli studenti</a:t>
-            </a:r>
-            <a:endParaRPr lang="en-US" sz="1350" dirty="0"/>
-          </a:p>
-        </p:txBody>
-      </p:sp>
-      <p:sp>
-        <p:nvSpPr>
-          <p:cNvPr id="19" name="Shape 17"/>
-          <p:cNvSpPr/>
-          <p:nvPr/>
-        </p:nvSpPr>
-        <p:spPr>
-          <a:xfrm>
-            <a:off x="1051560" y="5193792"/>
-            <a:ext cx="384048" cy="384048"/>
-          </a:xfrm>
-          <a:prstGeom prst="ellipse">
-            <a:avLst/>
-          </a:prstGeom>
-          <a:solidFill>
-            <a:srgbClr val="1E2761"/>
-          </a:solidFill>
-          <a:ln w="12700">
-            <a:solidFill>
-              <a:srgbClr val="1E2761"/>
-            </a:solidFill>
-            <a:prstDash val="solid"/>
-          </a:ln>
-        </p:spPr>
-      </p:sp>
-      <p:sp>
-        <p:nvSpPr>
-          <p:cNvPr id="20" name="Text 18"/>
-          <p:cNvSpPr/>
-          <p:nvPr/>
-        </p:nvSpPr>
-        <p:spPr>
-          <a:xfrm>
-            <a:off x="1051560" y="5193792"/>
-            <a:ext cx="384048" cy="384048"/>
-          </a:xfrm>
-          <a:prstGeom prst="rect">
-            <a:avLst/>
-          </a:prstGeom>
-          <a:noFill/>
-          <a:ln/>
-        </p:spPr>
-        <p:txBody>
-          <a:bodyPr wrap="square" lIns="0" tIns="0" rIns="0" bIns="0" rtlCol="0" anchor="ctr"/>
-          <a:lstStyle/>
-          <a:p>
-            <a:pPr algn="ctr" indent="0" marL="0">
-              <a:buNone/>
-            </a:pPr>
-            <a:r>
-              <a:rPr lang="en-US" sz="1300" b="1" dirty="0">
-                <a:solidFill>
-                  <a:srgbClr val="FFFFFF"/>
-                </a:solidFill>
-                <a:latin typeface="Cambria" pitchFamily="34" charset="0"/>
-                <a:ea typeface="Cambria" pitchFamily="34" charset="-122"/>
-                <a:cs typeface="Cambria" pitchFamily="34" charset="-120"/>
-              </a:rPr>
-              <a:t>5</a:t>
-            </a:r>
-            <a:endParaRPr lang="en-US" sz="1300" dirty="0"/>
-          </a:p>
-        </p:txBody>
-      </p:sp>
-      <p:sp>
-        <p:nvSpPr>
-          <p:cNvPr id="21" name="Text 19"/>
-          <p:cNvSpPr/>
-          <p:nvPr/>
-        </p:nvSpPr>
-        <p:spPr>
-          <a:xfrm>
-            <a:off x="1600200" y="5148072"/>
-            <a:ext cx="6309360" cy="777240"/>
-          </a:xfrm>
-          <a:prstGeom prst="rect">
-            <a:avLst/>
-          </a:prstGeom>
-          <a:noFill/>
-          <a:ln/>
-        </p:spPr>
-        <p:txBody>
-          <a:bodyPr wrap="square" lIns="0" tIns="0" rIns="0" bIns="0" rtlCol="0" anchor="t"/>
-          <a:lstStyle/>
-          <a:p>
-            <a:pPr indent="0" marL="0">
-              <a:buNone/>
-            </a:pPr>
-            <a:r>
-              <a:rPr lang="en-US" sz="1350" dirty="0">
-                <a:solidFill>
-                  <a:srgbClr val="26303B"/>
-                </a:solidFill>
-                <a:latin typeface="Calibri" pitchFamily="34" charset="0"/>
-                <a:ea typeface="Calibri" pitchFamily="34" charset="-122"/>
-                <a:cs typeface="Calibri" pitchFamily="34" charset="-120"/>
-              </a:rPr>
-              <a:t>Restituzione: l'esito più interessante per gruppo — e un caso in cui la controprova ha smentito la prima impressione (10')</a:t>
-            </a:r>
-            <a:endParaRPr lang="en-US" sz="1350" dirty="0"/>
-          </a:p>
-        </p:txBody>
-      </p:sp>
-      <p:sp>
-        <p:nvSpPr>
-          <p:cNvPr id="22" name="Shape 20"/>
-          <p:cNvSpPr/>
-          <p:nvPr/>
-        </p:nvSpPr>
-        <p:spPr>
-          <a:xfrm>
-            <a:off x="8412480" y="1600200"/>
-            <a:ext cx="3200400" cy="4572000"/>
-          </a:xfrm>
-          <a:prstGeom prst="roundRect">
-            <a:avLst>
-              <a:gd name="adj" fmla="val 2571"/>
-            </a:avLst>
-          </a:prstGeom>
-          <a:solidFill>
-            <a:srgbClr val="FFFFFF"/>
-          </a:solidFill>
-          <a:ln w="12700">
-            <a:solidFill>
-              <a:srgbClr val="FFFFFF"/>
-            </a:solidFill>
-            <a:prstDash val="solid"/>
-          </a:ln>
-        </p:spPr>
-      </p:sp>
-      <p:sp>
-        <p:nvSpPr>
-          <p:cNvPr id="23" name="Text 21"/>
-          <p:cNvSpPr/>
-          <p:nvPr/>
-        </p:nvSpPr>
-        <p:spPr>
-          <a:xfrm>
-            <a:off x="8641080" y="1764792"/>
-            <a:ext cx="2743200" cy="320040"/>
-          </a:xfrm>
-          <a:prstGeom prst="rect">
-            <a:avLst/>
-          </a:prstGeom>
-          <a:noFill/>
-          <a:ln/>
-        </p:spPr>
-        <p:txBody>
-          <a:bodyPr wrap="square" lIns="0" tIns="0" rIns="0" bIns="0" rtlCol="0" anchor="ctr"/>
-          <a:lstStyle/>
-          <a:p>
-            <a:pPr indent="0" marL="0">
-              <a:buNone/>
-            </a:pPr>
-            <a:r>
-              <a:rPr lang="en-US" sz="1450" b="1" dirty="0">
-                <a:solidFill>
-                  <a:srgbClr val="1E2761"/>
-                </a:solidFill>
-                <a:latin typeface="Cambria" pitchFamily="34" charset="0"/>
-                <a:ea typeface="Cambria" pitchFamily="34" charset="-122"/>
-                <a:cs typeface="Cambria" pitchFamily="34" charset="-120"/>
-              </a:rPr>
-              <a:t>In pratica</a:t>
-            </a:r>
-            <a:endParaRPr lang="en-US" sz="1450" dirty="0"/>
-          </a:p>
-        </p:txBody>
-      </p:sp>
-      <p:sp>
-        <p:nvSpPr>
-          <p:cNvPr id="24" name="Text 22"/>
-          <p:cNvSpPr/>
-          <p:nvPr/>
-        </p:nvSpPr>
-        <p:spPr>
-          <a:xfrm>
-            <a:off x="8641080" y="2130552"/>
-            <a:ext cx="2743200" cy="3886200"/>
+            <a:off x="7863840" y="2130552"/>
+            <a:ext cx="3520440" cy="3794760"/>
           </a:xfrm>
           <a:prstGeom prst="rect">
             <a:avLst/>
@@ -4944,7 +4639,7 @@
               <a:buChar char="•"/>
             </a:pPr>
             <a:r>
-              <a:rPr lang="en-US" sz="1250" b="1" dirty="0">
+              <a:rPr lang="en-US" sz="1250" dirty="0">
                 <a:solidFill>
                   <a:srgbClr val="26303B"/>
                 </a:solidFill>
@@ -4952,7 +4647,7 @@
                 <a:ea typeface="Calibri" pitchFamily="34" charset="-122"/>
                 <a:cs typeface="Calibri" pitchFamily="34" charset="-120"/>
               </a:rPr>
-              <a:t>60 minuti totali</a:t>
+              <a:t>Ogni gruppo usa l'autocritica forzata sull'output del proprio audit</a:t>
             </a:r>
             <a:endParaRPr lang="en-US" sz="1250" dirty="0"/>
           </a:p>
@@ -4973,7 +4668,7 @@
                 <a:ea typeface="Calibri" pitchFamily="34" charset="-122"/>
                 <a:cs typeface="Calibri" pitchFamily="34" charset="-120"/>
               </a:rPr>
-              <a:t>Gruppi da 3 in stanze</a:t>
+              <a:t>L'autocritica dell'IA è un'evidenza in più — da verificare a sua volta</a:t>
             </a:r>
             <a:endParaRPr lang="en-US" sz="1250" dirty="0"/>
           </a:p>
@@ -4986,7 +4681,7 @@
               <a:buChar char="•"/>
             </a:pPr>
             <a:r>
-              <a:rPr lang="en-US" sz="1250" dirty="0">
+              <a:rPr lang="en-US" sz="1250" b="1" dirty="0">
                 <a:solidFill>
                   <a:srgbClr val="26303B"/>
                 </a:solidFill>
@@ -4994,28 +4689,7 @@
                 <a:ea typeface="Calibri" pitchFamily="34" charset="-122"/>
                 <a:cs typeface="Calibri" pitchFamily="34" charset="-120"/>
               </a:rPr>
-              <a:t>Scheda E5: protocollo + tabella di registrazione</a:t>
-            </a:r>
-            <a:endParaRPr lang="en-US" sz="1250" dirty="0"/>
-          </a:p>
-          <a:p>
-            <a:pPr marL="152400" indent="-152400">
-              <a:spcAft>
-                <a:spcPts val="500"/>
-              </a:spcAft>
-              <a:buSzPct val="100000"/>
-              <a:buChar char="•"/>
-            </a:pPr>
-            <a:r>
-              <a:rPr lang="en-US" sz="1250" b="1" dirty="0">
-                <a:solidFill>
-                  <a:srgbClr val="26303B"/>
-                </a:solidFill>
-                <a:latin typeface="Calibri" pitchFamily="34" charset="0"/>
-                <a:ea typeface="Calibri" pitchFamily="34" charset="-122"/>
-                <a:cs typeface="Calibri" pitchFamily="34" charset="-120"/>
-              </a:rPr>
-              <a:t>L'audit progettato è un'attività della UdA (consegna)</a:t>
+              <a:t>Scheda E7: la libreria completa dei template</a:t>
             </a:r>
             <a:endParaRPr lang="en-US" sz="1250" dirty="0"/>
           </a:p>
@@ -5150,7 +4824,7 @@
                 <a:ea typeface="Calibri" pitchFamily="34" charset="-122"/>
                 <a:cs typeface="Calibri" pitchFamily="34" charset="-120"/>
               </a:rPr>
-              <a:t>Ethic-AI 2 — Etica, Bias e Cittadinanza nell'era dell'IA</a:t>
+              <a:t>Esercitazione — mani sulla tastiera</a:t>
             </a:r>
             <a:endParaRPr lang="en-US" sz="1100" dirty="0"/>
           </a:p>
@@ -5189,7 +4863,7 @@
                 <a:ea typeface="Cambria" pitchFamily="34" charset="-122"/>
                 <a:cs typeface="Cambria" pitchFamily="34" charset="-120"/>
               </a:rPr>
-              <a:t>Bussola internazionale 2026</a:t>
+              <a:t>Laboratorio: bias audit sulla vostra UdA</a:t>
             </a:r>
             <a:endParaRPr lang="en-US" sz="3000" dirty="0"/>
           </a:p>
@@ -5197,103 +4871,18 @@
       </p:sp>
       <p:sp>
         <p:nvSpPr>
-          <p:cNvPr id="6" name="Text 4"/>
+          <p:cNvPr id="6" name="Shape 4"/>
           <p:cNvSpPr/>
           <p:nvPr/>
         </p:nvSpPr>
         <p:spPr>
           <a:xfrm>
             <a:off x="822960" y="1600200"/>
-            <a:ext cx="6492240" cy="4754880"/>
-          </a:xfrm>
-          <a:prstGeom prst="rect">
-            <a:avLst/>
-          </a:prstGeom>
-          <a:noFill/>
-          <a:ln/>
-        </p:spPr>
-        <p:txBody>
-          <a:bodyPr wrap="square" lIns="0" tIns="0" rIns="0" bIns="0" rtlCol="0" anchor="t"/>
-          <a:lstStyle/>
-          <a:p>
-            <a:pPr marL="177800" indent="-177800">
-              <a:spcAft>
-                <a:spcPts val="800"/>
-              </a:spcAft>
-              <a:buSzPct val="100000"/>
-              <a:buChar char="•"/>
-            </a:pPr>
-            <a:r>
-              <a:rPr lang="en-US" sz="1500" b="1" dirty="0">
-                <a:solidFill>
-                  <a:srgbClr val="26303B"/>
-                </a:solidFill>
-                <a:latin typeface="Calibri" pitchFamily="34" charset="0"/>
-                <a:ea typeface="Calibri" pitchFamily="34" charset="-122"/>
-                <a:cs typeface="Calibri" pitchFamily="34" charset="-120"/>
-              </a:rPr>
-              <a:t>OECD Digital Education Outlook 2026: «partner di apprendimento, non scorciatoia» — e il monito della 'metacognitive laziness': senza metodo, il chatbot ci disabitua a diagnosticare il nostro stesso bisogno di capire</a:t>
-            </a:r>
-            <a:endParaRPr lang="en-US" sz="1500" dirty="0"/>
-          </a:p>
-          <a:p>
-            <a:pPr marL="177800" indent="-177800">
-              <a:spcAft>
-                <a:spcPts val="800"/>
-              </a:spcAft>
-              <a:buSzPct val="100000"/>
-              <a:buChar char="•"/>
-            </a:pPr>
-            <a:r>
-              <a:rPr lang="en-US" sz="1500" dirty="0">
-                <a:solidFill>
-                  <a:srgbClr val="26303B"/>
-                </a:solidFill>
-                <a:latin typeface="Calibri" pitchFamily="34" charset="0"/>
-                <a:ea typeface="Calibri" pitchFamily="34" charset="-122"/>
-                <a:cs typeface="Calibri" pitchFamily="34" charset="-120"/>
-              </a:rPr>
-              <a:t>UNESCO — antologia 2025 (Perkins &amp; Roe): era post-plagiarism — il design delle prove batte la sorveglianza</a:t>
-            </a:r>
-            <a:endParaRPr lang="en-US" sz="1500" dirty="0"/>
-          </a:p>
-          <a:p>
-            <a:pPr marL="177800" indent="-177800">
-              <a:spcAft>
-                <a:spcPts val="800"/>
-              </a:spcAft>
-              <a:buSzPct val="100000"/>
-              <a:buChar char="•"/>
-            </a:pPr>
-            <a:r>
-              <a:rPr lang="en-US" sz="1500" dirty="0">
-                <a:solidFill>
-                  <a:srgbClr val="26303B"/>
-                </a:solidFill>
-                <a:latin typeface="Calibri" pitchFamily="34" charset="0"/>
-                <a:ea typeface="Calibri" pitchFamily="34" charset="-122"/>
-                <a:cs typeface="Calibri" pitchFamily="34" charset="-120"/>
-              </a:rPr>
-              <a:t>UNESCO — MOOC Digital Citizenship (2ª ed.): il modulo su algoritmi e disinformazione è il gemello internazionale di questo incontro</a:t>
-            </a:r>
-            <a:endParaRPr lang="en-US" sz="1500" dirty="0"/>
-          </a:p>
-        </p:txBody>
-      </p:sp>
-      <p:sp>
-        <p:nvSpPr>
-          <p:cNvPr id="7" name="Shape 5"/>
-          <p:cNvSpPr/>
-          <p:nvPr/>
-        </p:nvSpPr>
-        <p:spPr>
-          <a:xfrm>
-            <a:off x="7635240" y="1600200"/>
-            <a:ext cx="3977640" cy="4480560"/>
+            <a:ext cx="7315200" cy="4572000"/>
           </a:xfrm>
           <a:prstGeom prst="roundRect">
             <a:avLst>
-              <a:gd name="adj" fmla="val 2069"/>
+              <a:gd name="adj" fmla="val 1800"/>
             </a:avLst>
           </a:prstGeom>
           <a:solidFill>
@@ -5309,14 +4898,39 @@
       </p:sp>
       <p:sp>
         <p:nvSpPr>
+          <p:cNvPr id="7" name="Shape 5"/>
+          <p:cNvSpPr/>
+          <p:nvPr/>
+        </p:nvSpPr>
+        <p:spPr>
+          <a:xfrm>
+            <a:off x="1051560" y="1828800"/>
+            <a:ext cx="384048" cy="384048"/>
+          </a:xfrm>
+          <a:prstGeom prst="ellipse">
+            <a:avLst/>
+          </a:prstGeom>
+          <a:solidFill>
+            <a:srgbClr val="1E2761"/>
+          </a:solidFill>
+          <a:ln w="12700">
+            <a:solidFill>
+              <a:srgbClr val="1E2761"/>
+            </a:solidFill>
+            <a:prstDash val="solid"/>
+          </a:ln>
+        </p:spPr>
+      </p:sp>
+      <p:sp>
+        <p:nvSpPr>
           <p:cNvPr id="8" name="Text 6"/>
           <p:cNvSpPr/>
           <p:nvPr/>
         </p:nvSpPr>
         <p:spPr>
           <a:xfrm>
-            <a:off x="7863840" y="1764792"/>
-            <a:ext cx="3520440" cy="320040"/>
+            <a:off x="1051560" y="1828800"/>
+            <a:ext cx="384048" cy="384048"/>
           </a:xfrm>
           <a:prstGeom prst="rect">
             <a:avLst/>
@@ -5328,19 +4942,536 @@
           <a:bodyPr wrap="square" lIns="0" tIns="0" rIns="0" bIns="0" rtlCol="0" anchor="ctr"/>
           <a:lstStyle/>
           <a:p>
-            <a:pPr indent="0" marL="0">
-              <a:buNone/>
-            </a:pPr>
-            <a:r>
-              <a:rPr lang="en-US" sz="1450" b="1" dirty="0">
-                <a:solidFill>
-                  <a:srgbClr val="1E2761"/>
+            <a:pPr algn="ctr" indent="0" marL="0">
+              <a:buNone/>
+            </a:pPr>
+            <a:r>
+              <a:rPr lang="en-US" sz="1300" b="1" dirty="0">
+                <a:solidFill>
+                  <a:srgbClr val="FFFFFF"/>
                 </a:solidFill>
                 <a:latin typeface="Cambria" pitchFamily="34" charset="0"/>
                 <a:ea typeface="Cambria" pitchFamily="34" charset="-122"/>
                 <a:cs typeface="Cambria" pitchFamily="34" charset="-120"/>
               </a:rPr>
-              <a:t>In una frase</a:t>
+              <a:t>1</a:t>
+            </a:r>
+            <a:endParaRPr lang="en-US" sz="1300" dirty="0"/>
+          </a:p>
+        </p:txBody>
+      </p:sp>
+      <p:sp>
+        <p:nvSpPr>
+          <p:cNvPr id="9" name="Text 7"/>
+          <p:cNvSpPr/>
+          <p:nvPr/>
+        </p:nvSpPr>
+        <p:spPr>
+          <a:xfrm>
+            <a:off x="1600200" y="1783080"/>
+            <a:ext cx="6309360" cy="777240"/>
+          </a:xfrm>
+          <a:prstGeom prst="rect">
+            <a:avLst/>
+          </a:prstGeom>
+          <a:noFill/>
+          <a:ln/>
+        </p:spPr>
+        <p:txBody>
+          <a:bodyPr wrap="square" lIns="0" tIns="0" rIns="0" bIns="0" rtlCol="0" anchor="t"/>
+          <a:lstStyle/>
+          <a:p>
+            <a:pPr indent="0" marL="0">
+              <a:buNone/>
+            </a:pPr>
+            <a:r>
+              <a:rPr lang="en-US" sz="1350" dirty="0">
+                <a:solidFill>
+                  <a:srgbClr val="26303B"/>
+                </a:solidFill>
+                <a:latin typeface="Calibri" pitchFamily="34" charset="0"/>
+                <a:ea typeface="Calibri" pitchFamily="34" charset="-122"/>
+                <a:cs typeface="Calibri" pitchFamily="34" charset="-120"/>
+              </a:rPr>
+              <a:t>In gruppi di 3: scegliete una UdA del gruppo e progettate il red-teaming per QUELLA classe — ipotesi di bias pertinente al tema (protocollo in 5 passi, scheda E5)</a:t>
+            </a:r>
+            <a:endParaRPr lang="en-US" sz="1350" dirty="0"/>
+          </a:p>
+        </p:txBody>
+      </p:sp>
+      <p:sp>
+        <p:nvSpPr>
+          <p:cNvPr id="10" name="Shape 8"/>
+          <p:cNvSpPr/>
+          <p:nvPr/>
+        </p:nvSpPr>
+        <p:spPr>
+          <a:xfrm>
+            <a:off x="1051560" y="2670048"/>
+            <a:ext cx="384048" cy="384048"/>
+          </a:xfrm>
+          <a:prstGeom prst="ellipse">
+            <a:avLst/>
+          </a:prstGeom>
+          <a:solidFill>
+            <a:srgbClr val="1E2761"/>
+          </a:solidFill>
+          <a:ln w="12700">
+            <a:solidFill>
+              <a:srgbClr val="1E2761"/>
+            </a:solidFill>
+            <a:prstDash val="solid"/>
+          </a:ln>
+        </p:spPr>
+      </p:sp>
+      <p:sp>
+        <p:nvSpPr>
+          <p:cNvPr id="11" name="Text 9"/>
+          <p:cNvSpPr/>
+          <p:nvPr/>
+        </p:nvSpPr>
+        <p:spPr>
+          <a:xfrm>
+            <a:off x="1051560" y="2670048"/>
+            <a:ext cx="384048" cy="384048"/>
+          </a:xfrm>
+          <a:prstGeom prst="rect">
+            <a:avLst/>
+          </a:prstGeom>
+          <a:noFill/>
+          <a:ln/>
+        </p:spPr>
+        <p:txBody>
+          <a:bodyPr wrap="square" lIns="0" tIns="0" rIns="0" bIns="0" rtlCol="0" anchor="ctr"/>
+          <a:lstStyle/>
+          <a:p>
+            <a:pPr algn="ctr" indent="0" marL="0">
+              <a:buNone/>
+            </a:pPr>
+            <a:r>
+              <a:rPr lang="en-US" sz="1300" b="1" dirty="0">
+                <a:solidFill>
+                  <a:srgbClr val="FFFFFF"/>
+                </a:solidFill>
+                <a:latin typeface="Cambria" pitchFamily="34" charset="0"/>
+                <a:ea typeface="Cambria" pitchFamily="34" charset="-122"/>
+                <a:cs typeface="Cambria" pitchFamily="34" charset="-120"/>
+              </a:rPr>
+              <a:t>2</a:t>
+            </a:r>
+            <a:endParaRPr lang="en-US" sz="1300" dirty="0"/>
+          </a:p>
+        </p:txBody>
+      </p:sp>
+      <p:sp>
+        <p:nvSpPr>
+          <p:cNvPr id="12" name="Text 10"/>
+          <p:cNvSpPr/>
+          <p:nvPr/>
+        </p:nvSpPr>
+        <p:spPr>
+          <a:xfrm>
+            <a:off x="1600200" y="2624328"/>
+            <a:ext cx="6309360" cy="777240"/>
+          </a:xfrm>
+          <a:prstGeom prst="rect">
+            <a:avLst/>
+          </a:prstGeom>
+          <a:noFill/>
+          <a:ln/>
+        </p:spPr>
+        <p:txBody>
+          <a:bodyPr wrap="square" lIns="0" tIns="0" rIns="0" bIns="0" rtlCol="0" anchor="t"/>
+          <a:lstStyle/>
+          <a:p>
+            <a:pPr indent="0" marL="0">
+              <a:buNone/>
+            </a:pPr>
+            <a:r>
+              <a:rPr lang="en-US" sz="1350" dirty="0">
+                <a:solidFill>
+                  <a:srgbClr val="26303B"/>
+                </a:solidFill>
+                <a:latin typeface="Calibri" pitchFamily="34" charset="0"/>
+                <a:ea typeface="Calibri" pitchFamily="34" charset="-122"/>
+                <a:cs typeface="Calibri" pitchFamily="34" charset="-120"/>
+              </a:rPr>
+              <a:t>Eseguite l'audit voi stessi su Gemini: almeno 3 probe con varianti e una controprova; registrate gli esiti in tabella</a:t>
+            </a:r>
+            <a:endParaRPr lang="en-US" sz="1350" dirty="0"/>
+          </a:p>
+        </p:txBody>
+      </p:sp>
+      <p:sp>
+        <p:nvSpPr>
+          <p:cNvPr id="13" name="Shape 11"/>
+          <p:cNvSpPr/>
+          <p:nvPr/>
+        </p:nvSpPr>
+        <p:spPr>
+          <a:xfrm>
+            <a:off x="1051560" y="3511296"/>
+            <a:ext cx="384048" cy="384048"/>
+          </a:xfrm>
+          <a:prstGeom prst="ellipse">
+            <a:avLst/>
+          </a:prstGeom>
+          <a:solidFill>
+            <a:srgbClr val="1E2761"/>
+          </a:solidFill>
+          <a:ln w="12700">
+            <a:solidFill>
+              <a:srgbClr val="1E2761"/>
+            </a:solidFill>
+            <a:prstDash val="solid"/>
+          </a:ln>
+        </p:spPr>
+      </p:sp>
+      <p:sp>
+        <p:nvSpPr>
+          <p:cNvPr id="14" name="Text 12"/>
+          <p:cNvSpPr/>
+          <p:nvPr/>
+        </p:nvSpPr>
+        <p:spPr>
+          <a:xfrm>
+            <a:off x="1051560" y="3511296"/>
+            <a:ext cx="384048" cy="384048"/>
+          </a:xfrm>
+          <a:prstGeom prst="rect">
+            <a:avLst/>
+          </a:prstGeom>
+          <a:noFill/>
+          <a:ln/>
+        </p:spPr>
+        <p:txBody>
+          <a:bodyPr wrap="square" lIns="0" tIns="0" rIns="0" bIns="0" rtlCol="0" anchor="ctr"/>
+          <a:lstStyle/>
+          <a:p>
+            <a:pPr algn="ctr" indent="0" marL="0">
+              <a:buNone/>
+            </a:pPr>
+            <a:r>
+              <a:rPr lang="en-US" sz="1300" b="1" dirty="0">
+                <a:solidFill>
+                  <a:srgbClr val="FFFFFF"/>
+                </a:solidFill>
+                <a:latin typeface="Cambria" pitchFamily="34" charset="0"/>
+                <a:ea typeface="Cambria" pitchFamily="34" charset="-122"/>
+                <a:cs typeface="Cambria" pitchFamily="34" charset="-120"/>
+              </a:rPr>
+              <a:t>3</a:t>
+            </a:r>
+            <a:endParaRPr lang="en-US" sz="1300" dirty="0"/>
+          </a:p>
+        </p:txBody>
+      </p:sp>
+      <p:sp>
+        <p:nvSpPr>
+          <p:cNvPr id="15" name="Text 13"/>
+          <p:cNvSpPr/>
+          <p:nvPr/>
+        </p:nvSpPr>
+        <p:spPr>
+          <a:xfrm>
+            <a:off x="1600200" y="3465576"/>
+            <a:ext cx="6309360" cy="777240"/>
+          </a:xfrm>
+          <a:prstGeom prst="rect">
+            <a:avLst/>
+          </a:prstGeom>
+          <a:noFill/>
+          <a:ln/>
+        </p:spPr>
+        <p:txBody>
+          <a:bodyPr wrap="square" lIns="0" tIns="0" rIns="0" bIns="0" rtlCol="0" anchor="t"/>
+          <a:lstStyle/>
+          <a:p>
+            <a:pPr indent="0" marL="0">
+              <a:buNone/>
+            </a:pPr>
+            <a:r>
+              <a:rPr lang="en-US" sz="1350" dirty="0">
+                <a:solidFill>
+                  <a:srgbClr val="26303B"/>
+                </a:solidFill>
+                <a:latin typeface="Calibri" pitchFamily="34" charset="0"/>
+                <a:ea typeface="Calibri" pitchFamily="34" charset="-122"/>
+                <a:cs typeface="Calibri" pitchFamily="34" charset="-120"/>
+              </a:rPr>
+              <a:t>Scrivete il 'rapporto': cosa avete trovato, con che confidenza, cosa non potete concludere</a:t>
+            </a:r>
+            <a:endParaRPr lang="en-US" sz="1350" dirty="0"/>
+          </a:p>
+        </p:txBody>
+      </p:sp>
+      <p:sp>
+        <p:nvSpPr>
+          <p:cNvPr id="16" name="Shape 14"/>
+          <p:cNvSpPr/>
+          <p:nvPr/>
+        </p:nvSpPr>
+        <p:spPr>
+          <a:xfrm>
+            <a:off x="1051560" y="4352544"/>
+            <a:ext cx="384048" cy="384048"/>
+          </a:xfrm>
+          <a:prstGeom prst="ellipse">
+            <a:avLst/>
+          </a:prstGeom>
+          <a:solidFill>
+            <a:srgbClr val="1E2761"/>
+          </a:solidFill>
+          <a:ln w="12700">
+            <a:solidFill>
+              <a:srgbClr val="1E2761"/>
+            </a:solidFill>
+            <a:prstDash val="solid"/>
+          </a:ln>
+        </p:spPr>
+      </p:sp>
+      <p:sp>
+        <p:nvSpPr>
+          <p:cNvPr id="17" name="Text 15"/>
+          <p:cNvSpPr/>
+          <p:nvPr/>
+        </p:nvSpPr>
+        <p:spPr>
+          <a:xfrm>
+            <a:off x="1051560" y="4352544"/>
+            <a:ext cx="384048" cy="384048"/>
+          </a:xfrm>
+          <a:prstGeom prst="rect">
+            <a:avLst/>
+          </a:prstGeom>
+          <a:noFill/>
+          <a:ln/>
+        </p:spPr>
+        <p:txBody>
+          <a:bodyPr wrap="square" lIns="0" tIns="0" rIns="0" bIns="0" rtlCol="0" anchor="ctr"/>
+          <a:lstStyle/>
+          <a:p>
+            <a:pPr algn="ctr" indent="0" marL="0">
+              <a:buNone/>
+            </a:pPr>
+            <a:r>
+              <a:rPr lang="en-US" sz="1300" b="1" dirty="0">
+                <a:solidFill>
+                  <a:srgbClr val="FFFFFF"/>
+                </a:solidFill>
+                <a:latin typeface="Cambria" pitchFamily="34" charset="0"/>
+                <a:ea typeface="Cambria" pitchFamily="34" charset="-122"/>
+                <a:cs typeface="Cambria" pitchFamily="34" charset="-120"/>
+              </a:rPr>
+              <a:t>4</a:t>
+            </a:r>
+            <a:endParaRPr lang="en-US" sz="1300" dirty="0"/>
+          </a:p>
+        </p:txBody>
+      </p:sp>
+      <p:sp>
+        <p:nvSpPr>
+          <p:cNvPr id="18" name="Text 16"/>
+          <p:cNvSpPr/>
+          <p:nvPr/>
+        </p:nvSpPr>
+        <p:spPr>
+          <a:xfrm>
+            <a:off x="1600200" y="4306824"/>
+            <a:ext cx="6309360" cy="777240"/>
+          </a:xfrm>
+          <a:prstGeom prst="rect">
+            <a:avLst/>
+          </a:prstGeom>
+          <a:noFill/>
+          <a:ln/>
+        </p:spPr>
+        <p:txBody>
+          <a:bodyPr wrap="square" lIns="0" tIns="0" rIns="0" bIns="0" rtlCol="0" anchor="t"/>
+          <a:lstStyle/>
+          <a:p>
+            <a:pPr indent="0" marL="0">
+              <a:buNone/>
+            </a:pPr>
+            <a:r>
+              <a:rPr lang="en-US" sz="1350" dirty="0">
+                <a:solidFill>
+                  <a:srgbClr val="26303B"/>
+                </a:solidFill>
+                <a:latin typeface="Calibri" pitchFamily="34" charset="0"/>
+                <a:ea typeface="Calibri" pitchFamily="34" charset="-122"/>
+                <a:cs typeface="Calibri" pitchFamily="34" charset="-120"/>
+              </a:rPr>
+              <a:t>Definite i ruoli per la classe (red/blue/giuria) e il prodotto atteso dagli studenti</a:t>
+            </a:r>
+            <a:endParaRPr lang="en-US" sz="1350" dirty="0"/>
+          </a:p>
+        </p:txBody>
+      </p:sp>
+      <p:sp>
+        <p:nvSpPr>
+          <p:cNvPr id="19" name="Shape 17"/>
+          <p:cNvSpPr/>
+          <p:nvPr/>
+        </p:nvSpPr>
+        <p:spPr>
+          <a:xfrm>
+            <a:off x="1051560" y="5193792"/>
+            <a:ext cx="384048" cy="384048"/>
+          </a:xfrm>
+          <a:prstGeom prst="ellipse">
+            <a:avLst/>
+          </a:prstGeom>
+          <a:solidFill>
+            <a:srgbClr val="1E2761"/>
+          </a:solidFill>
+          <a:ln w="12700">
+            <a:solidFill>
+              <a:srgbClr val="1E2761"/>
+            </a:solidFill>
+            <a:prstDash val="solid"/>
+          </a:ln>
+        </p:spPr>
+      </p:sp>
+      <p:sp>
+        <p:nvSpPr>
+          <p:cNvPr id="20" name="Text 18"/>
+          <p:cNvSpPr/>
+          <p:nvPr/>
+        </p:nvSpPr>
+        <p:spPr>
+          <a:xfrm>
+            <a:off x="1051560" y="5193792"/>
+            <a:ext cx="384048" cy="384048"/>
+          </a:xfrm>
+          <a:prstGeom prst="rect">
+            <a:avLst/>
+          </a:prstGeom>
+          <a:noFill/>
+          <a:ln/>
+        </p:spPr>
+        <p:txBody>
+          <a:bodyPr wrap="square" lIns="0" tIns="0" rIns="0" bIns="0" rtlCol="0" anchor="ctr"/>
+          <a:lstStyle/>
+          <a:p>
+            <a:pPr algn="ctr" indent="0" marL="0">
+              <a:buNone/>
+            </a:pPr>
+            <a:r>
+              <a:rPr lang="en-US" sz="1300" b="1" dirty="0">
+                <a:solidFill>
+                  <a:srgbClr val="FFFFFF"/>
+                </a:solidFill>
+                <a:latin typeface="Cambria" pitchFamily="34" charset="0"/>
+                <a:ea typeface="Cambria" pitchFamily="34" charset="-122"/>
+                <a:cs typeface="Cambria" pitchFamily="34" charset="-120"/>
+              </a:rPr>
+              <a:t>5</a:t>
+            </a:r>
+            <a:endParaRPr lang="en-US" sz="1300" dirty="0"/>
+          </a:p>
+        </p:txBody>
+      </p:sp>
+      <p:sp>
+        <p:nvSpPr>
+          <p:cNvPr id="21" name="Text 19"/>
+          <p:cNvSpPr/>
+          <p:nvPr/>
+        </p:nvSpPr>
+        <p:spPr>
+          <a:xfrm>
+            <a:off x="1600200" y="5148072"/>
+            <a:ext cx="6309360" cy="777240"/>
+          </a:xfrm>
+          <a:prstGeom prst="rect">
+            <a:avLst/>
+          </a:prstGeom>
+          <a:noFill/>
+          <a:ln/>
+        </p:spPr>
+        <p:txBody>
+          <a:bodyPr wrap="square" lIns="0" tIns="0" rIns="0" bIns="0" rtlCol="0" anchor="t"/>
+          <a:lstStyle/>
+          <a:p>
+            <a:pPr indent="0" marL="0">
+              <a:buNone/>
+            </a:pPr>
+            <a:r>
+              <a:rPr lang="en-US" sz="1350" dirty="0">
+                <a:solidFill>
+                  <a:srgbClr val="26303B"/>
+                </a:solidFill>
+                <a:latin typeface="Calibri" pitchFamily="34" charset="0"/>
+                <a:ea typeface="Calibri" pitchFamily="34" charset="-122"/>
+                <a:cs typeface="Calibri" pitchFamily="34" charset="-120"/>
+              </a:rPr>
+              <a:t>Restituzione: l'esito più interessante per gruppo — e un caso in cui la controprova ha smentito la prima impressione (10')</a:t>
+            </a:r>
+            <a:endParaRPr lang="en-US" sz="1350" dirty="0"/>
+          </a:p>
+        </p:txBody>
+      </p:sp>
+      <p:sp>
+        <p:nvSpPr>
+          <p:cNvPr id="22" name="Shape 20"/>
+          <p:cNvSpPr/>
+          <p:nvPr/>
+        </p:nvSpPr>
+        <p:spPr>
+          <a:xfrm>
+            <a:off x="8412480" y="1600200"/>
+            <a:ext cx="3200400" cy="4572000"/>
+          </a:xfrm>
+          <a:prstGeom prst="roundRect">
+            <a:avLst>
+              <a:gd name="adj" fmla="val 2571"/>
+            </a:avLst>
+          </a:prstGeom>
+          <a:solidFill>
+            <a:srgbClr val="FFFFFF"/>
+          </a:solidFill>
+          <a:ln w="12700">
+            <a:solidFill>
+              <a:srgbClr val="FFFFFF"/>
+            </a:solidFill>
+            <a:prstDash val="solid"/>
+          </a:ln>
+        </p:spPr>
+      </p:sp>
+      <p:sp>
+        <p:nvSpPr>
+          <p:cNvPr id="23" name="Text 21"/>
+          <p:cNvSpPr/>
+          <p:nvPr/>
+        </p:nvSpPr>
+        <p:spPr>
+          <a:xfrm>
+            <a:off x="8641080" y="1764792"/>
+            <a:ext cx="2743200" cy="320040"/>
+          </a:xfrm>
+          <a:prstGeom prst="rect">
+            <a:avLst/>
+          </a:prstGeom>
+          <a:noFill/>
+          <a:ln/>
+        </p:spPr>
+        <p:txBody>
+          <a:bodyPr wrap="square" lIns="0" tIns="0" rIns="0" bIns="0" rtlCol="0" anchor="ctr"/>
+          <a:lstStyle/>
+          <a:p>
+            <a:pPr indent="0" marL="0">
+              <a:buNone/>
+            </a:pPr>
+            <a:r>
+              <a:rPr lang="en-US" sz="1450" b="1" dirty="0">
+                <a:solidFill>
+                  <a:srgbClr val="1E2761"/>
+                </a:solidFill>
+                <a:latin typeface="Cambria" pitchFamily="34" charset="0"/>
+                <a:ea typeface="Cambria" pitchFamily="34" charset="-122"/>
+                <a:cs typeface="Cambria" pitchFamily="34" charset="-120"/>
+              </a:rPr>
+              <a:t>In pratica</a:t>
             </a:r>
             <a:endParaRPr lang="en-US" sz="1450" dirty="0"/>
           </a:p>
@@ -5348,14 +5479,14 @@
       </p:sp>
       <p:sp>
         <p:nvSpPr>
-          <p:cNvPr id="9" name="Text 7"/>
-          <p:cNvSpPr/>
-          <p:nvPr/>
-        </p:nvSpPr>
-        <p:spPr>
-          <a:xfrm>
-            <a:off x="7863840" y="2130552"/>
-            <a:ext cx="3520440" cy="3794760"/>
+          <p:cNvPr id="24" name="Text 22"/>
+          <p:cNvSpPr/>
+          <p:nvPr/>
+        </p:nvSpPr>
+        <p:spPr>
+          <a:xfrm>
+            <a:off x="8641080" y="2130552"/>
+            <a:ext cx="2743200" cy="3886200"/>
           </a:xfrm>
           <a:prstGeom prst="rect">
             <a:avLst/>
@@ -5367,11 +5498,12 @@
           <a:bodyPr wrap="square" lIns="0" tIns="0" rIns="0" bIns="0" rtlCol="0" anchor="t"/>
           <a:lstStyle/>
           <a:p>
-            <a:pPr indent="0" marL="0">
+            <a:pPr marL="152400" indent="-152400">
               <a:spcAft>
                 <a:spcPts val="500"/>
               </a:spcAft>
-              <a:buNone/>
+              <a:buSzPct val="100000"/>
+              <a:buChar char="•"/>
             </a:pPr>
             <a:r>
               <a:rPr lang="en-US" sz="1250" b="1" dirty="0">
@@ -5382,16 +5514,17 @@
                 <a:ea typeface="Calibri" pitchFamily="34" charset="-122"/>
                 <a:cs typeface="Calibri" pitchFamily="34" charset="-120"/>
               </a:rPr>
-              <a:t>Interrogare i sistemi con metodo è la forma 2026 del pensiero critico</a:t>
+              <a:t>60 minuti totali</a:t>
             </a:r>
             <a:endParaRPr lang="en-US" sz="1250" dirty="0"/>
           </a:p>
           <a:p>
-            <a:pPr indent="0" marL="0">
+            <a:pPr marL="152400" indent="-152400">
               <a:spcAft>
                 <a:spcPts val="500"/>
               </a:spcAft>
-              <a:buNone/>
+              <a:buSzPct val="100000"/>
+              <a:buChar char="•"/>
             </a:pPr>
             <a:r>
               <a:rPr lang="en-US" sz="1250" dirty="0">
@@ -5402,7 +5535,49 @@
                 <a:ea typeface="Calibri" pitchFamily="34" charset="-122"/>
                 <a:cs typeface="Calibri" pitchFamily="34" charset="-120"/>
               </a:rPr>
-              <a:t>E si insegna facendola, non raccontandola</a:t>
+              <a:t>Gruppi da 3 in stanze</a:t>
+            </a:r>
+            <a:endParaRPr lang="en-US" sz="1250" dirty="0"/>
+          </a:p>
+          <a:p>
+            <a:pPr marL="152400" indent="-152400">
+              <a:spcAft>
+                <a:spcPts val="500"/>
+              </a:spcAft>
+              <a:buSzPct val="100000"/>
+              <a:buChar char="•"/>
+            </a:pPr>
+            <a:r>
+              <a:rPr lang="en-US" sz="1250" dirty="0">
+                <a:solidFill>
+                  <a:srgbClr val="26303B"/>
+                </a:solidFill>
+                <a:latin typeface="Calibri" pitchFamily="34" charset="0"/>
+                <a:ea typeface="Calibri" pitchFamily="34" charset="-122"/>
+                <a:cs typeface="Calibri" pitchFamily="34" charset="-120"/>
+              </a:rPr>
+              <a:t>Scheda E5: protocollo + tabella di registrazione</a:t>
+            </a:r>
+            <a:endParaRPr lang="en-US" sz="1250" dirty="0"/>
+          </a:p>
+          <a:p>
+            <a:pPr marL="152400" indent="-152400">
+              <a:spcAft>
+                <a:spcPts val="500"/>
+              </a:spcAft>
+              <a:buSzPct val="100000"/>
+              <a:buChar char="•"/>
+            </a:pPr>
+            <a:r>
+              <a:rPr lang="en-US" sz="1250" b="1" dirty="0">
+                <a:solidFill>
+                  <a:srgbClr val="26303B"/>
+                </a:solidFill>
+                <a:latin typeface="Calibri" pitchFamily="34" charset="0"/>
+                <a:ea typeface="Calibri" pitchFamily="34" charset="-122"/>
+                <a:cs typeface="Calibri" pitchFamily="34" charset="-120"/>
+              </a:rPr>
+              <a:t>L'audit progettato è un'attività della UdA (consegna)</a:t>
             </a:r>
             <a:endParaRPr lang="en-US" sz="1250" dirty="0"/>
           </a:p>
@@ -5419,6 +5594,393 @@
 <file path=ppt/slides/slide8.xml><?xml version="1.0" encoding="utf-8"?>
 <p:sld xmlns:a="http://schemas.openxmlformats.org/drawingml/2006/main" xmlns:r="http://schemas.openxmlformats.org/officeDocument/2006/relationships" xmlns:p="http://schemas.openxmlformats.org/presentationml/2006/main">
   <p:cSld name="Slide 8">
+    <p:bg>
+      <p:bgPr>
+        <a:solidFill>
+          <a:srgbClr val="FFFFFF"/>
+        </a:solidFill>
+      </p:bgPr>
+    </p:bg>
+    <p:spTree>
+      <p:nvGrpSpPr>
+        <p:cNvPr id="1" name=""/>
+        <p:cNvGrpSpPr/>
+        <p:nvPr/>
+      </p:nvGrpSpPr>
+      <p:grpSpPr>
+        <a:xfrm>
+          <a:off x="0" y="0"/>
+          <a:ext cx="0" cy="0"/>
+          <a:chOff x="0" y="0"/>
+          <a:chExt cx="0" cy="0"/>
+        </a:xfrm>
+      </p:grpSpPr>
+      <p:sp>
+        <p:nvSpPr>
+          <p:cNvPr id="2" name="Shape 0"/>
+          <p:cNvSpPr/>
+          <p:nvPr/>
+        </p:nvSpPr>
+        <p:spPr>
+          <a:xfrm>
+            <a:off x="502920" y="384048"/>
+            <a:ext cx="566928" cy="566928"/>
+          </a:xfrm>
+          <a:prstGeom prst="ellipse">
+            <a:avLst/>
+          </a:prstGeom>
+          <a:solidFill>
+            <a:srgbClr val="1E2761"/>
+          </a:solidFill>
+          <a:ln w="12700">
+            <a:solidFill>
+              <a:srgbClr val="1E2761"/>
+            </a:solidFill>
+            <a:prstDash val="solid"/>
+          </a:ln>
+        </p:spPr>
+      </p:sp>
+      <p:sp>
+        <p:nvSpPr>
+          <p:cNvPr id="3" name="Text 1"/>
+          <p:cNvSpPr/>
+          <p:nvPr/>
+        </p:nvSpPr>
+        <p:spPr>
+          <a:xfrm>
+            <a:off x="502920" y="384048"/>
+            <a:ext cx="566928" cy="566928"/>
+          </a:xfrm>
+          <a:prstGeom prst="rect">
+            <a:avLst/>
+          </a:prstGeom>
+          <a:noFill/>
+          <a:ln/>
+        </p:spPr>
+        <p:txBody>
+          <a:bodyPr wrap="square" lIns="0" tIns="0" rIns="0" bIns="0" rtlCol="0" anchor="ctr"/>
+          <a:lstStyle/>
+          <a:p>
+            <a:pPr algn="ctr" indent="0" marL="0">
+              <a:buNone/>
+            </a:pPr>
+            <a:r>
+              <a:rPr lang="en-US" sz="1800" b="1" dirty="0">
+                <a:solidFill>
+                  <a:srgbClr val="FFFFFF"/>
+                </a:solidFill>
+                <a:latin typeface="Cambria" pitchFamily="34" charset="0"/>
+                <a:ea typeface="Cambria" pitchFamily="34" charset="-122"/>
+                <a:cs typeface="Cambria" pitchFamily="34" charset="-120"/>
+              </a:rPr>
+              <a:t>5</a:t>
+            </a:r>
+            <a:endParaRPr lang="en-US" sz="1800" dirty="0"/>
+          </a:p>
+        </p:txBody>
+      </p:sp>
+      <p:sp>
+        <p:nvSpPr>
+          <p:cNvPr id="4" name="Text 2"/>
+          <p:cNvSpPr/>
+          <p:nvPr/>
+        </p:nvSpPr>
+        <p:spPr>
+          <a:xfrm>
+            <a:off x="1234440" y="347472"/>
+            <a:ext cx="9601200" cy="274320"/>
+          </a:xfrm>
+          <a:prstGeom prst="rect">
+            <a:avLst/>
+          </a:prstGeom>
+          <a:noFill/>
+          <a:ln/>
+        </p:spPr>
+        <p:txBody>
+          <a:bodyPr wrap="square" lIns="0" tIns="0" rIns="0" bIns="0" rtlCol="0" anchor="ctr"/>
+          <a:lstStyle/>
+          <a:p>
+            <a:pPr indent="0" marL="0">
+              <a:buNone/>
+            </a:pPr>
+            <a:r>
+              <a:rPr lang="en-US" sz="1100" dirty="0">
+                <a:solidFill>
+                  <a:srgbClr val="5B6B7C"/>
+                </a:solidFill>
+                <a:latin typeface="Calibri" pitchFamily="34" charset="0"/>
+                <a:ea typeface="Calibri" pitchFamily="34" charset="-122"/>
+                <a:cs typeface="Calibri" pitchFamily="34" charset="-120"/>
+              </a:rPr>
+              <a:t>Ethic-AI 2 — Etica, Bias e Cittadinanza nell'era dell'IA</a:t>
+            </a:r>
+            <a:endParaRPr lang="en-US" sz="1100" dirty="0"/>
+          </a:p>
+        </p:txBody>
+      </p:sp>
+      <p:sp>
+        <p:nvSpPr>
+          <p:cNvPr id="5" name="Text 3"/>
+          <p:cNvSpPr/>
+          <p:nvPr/>
+        </p:nvSpPr>
+        <p:spPr>
+          <a:xfrm>
+            <a:off x="1234440" y="566928"/>
+            <a:ext cx="10332720" cy="685800"/>
+          </a:xfrm>
+          <a:prstGeom prst="rect">
+            <a:avLst/>
+          </a:prstGeom>
+          <a:noFill/>
+          <a:ln/>
+        </p:spPr>
+        <p:txBody>
+          <a:bodyPr wrap="square" lIns="0" tIns="0" rIns="0" bIns="0" rtlCol="0" anchor="ctr"/>
+          <a:lstStyle/>
+          <a:p>
+            <a:pPr indent="0" marL="0">
+              <a:buNone/>
+            </a:pPr>
+            <a:r>
+              <a:rPr lang="en-US" sz="3000" b="1" dirty="0">
+                <a:solidFill>
+                  <a:srgbClr val="1E2761"/>
+                </a:solidFill>
+                <a:latin typeface="Cambria" pitchFamily="34" charset="0"/>
+                <a:ea typeface="Cambria" pitchFamily="34" charset="-122"/>
+                <a:cs typeface="Cambria" pitchFamily="34" charset="-120"/>
+              </a:rPr>
+              <a:t>Bussola internazionale 2026</a:t>
+            </a:r>
+            <a:endParaRPr lang="en-US" sz="3000" dirty="0"/>
+          </a:p>
+        </p:txBody>
+      </p:sp>
+      <p:sp>
+        <p:nvSpPr>
+          <p:cNvPr id="6" name="Text 4"/>
+          <p:cNvSpPr/>
+          <p:nvPr/>
+        </p:nvSpPr>
+        <p:spPr>
+          <a:xfrm>
+            <a:off x="822960" y="1600200"/>
+            <a:ext cx="6492240" cy="4754880"/>
+          </a:xfrm>
+          <a:prstGeom prst="rect">
+            <a:avLst/>
+          </a:prstGeom>
+          <a:noFill/>
+          <a:ln/>
+        </p:spPr>
+        <p:txBody>
+          <a:bodyPr wrap="square" lIns="0" tIns="0" rIns="0" bIns="0" rtlCol="0" anchor="t"/>
+          <a:lstStyle/>
+          <a:p>
+            <a:pPr marL="177800" indent="-177800">
+              <a:spcAft>
+                <a:spcPts val="800"/>
+              </a:spcAft>
+              <a:buSzPct val="100000"/>
+              <a:buChar char="•"/>
+            </a:pPr>
+            <a:r>
+              <a:rPr lang="en-US" sz="1500" b="1" dirty="0">
+                <a:solidFill>
+                  <a:srgbClr val="26303B"/>
+                </a:solidFill>
+                <a:latin typeface="Calibri" pitchFamily="34" charset="0"/>
+                <a:ea typeface="Calibri" pitchFamily="34" charset="-122"/>
+                <a:cs typeface="Calibri" pitchFamily="34" charset="-120"/>
+              </a:rPr>
+              <a:t>OECD Digital Education Outlook 2026: «partner di apprendimento, non scorciatoia» — e il monito della 'metacognitive laziness': senza metodo, il chatbot ci disabitua a diagnosticare il nostro stesso bisogno di capire</a:t>
+            </a:r>
+            <a:endParaRPr lang="en-US" sz="1500" dirty="0"/>
+          </a:p>
+          <a:p>
+            <a:pPr marL="177800" indent="-177800">
+              <a:spcAft>
+                <a:spcPts val="800"/>
+              </a:spcAft>
+              <a:buSzPct val="100000"/>
+              <a:buChar char="•"/>
+            </a:pPr>
+            <a:r>
+              <a:rPr lang="en-US" sz="1500" dirty="0">
+                <a:solidFill>
+                  <a:srgbClr val="26303B"/>
+                </a:solidFill>
+                <a:latin typeface="Calibri" pitchFamily="34" charset="0"/>
+                <a:ea typeface="Calibri" pitchFamily="34" charset="-122"/>
+                <a:cs typeface="Calibri" pitchFamily="34" charset="-120"/>
+              </a:rPr>
+              <a:t>UNESCO — antologia 2025 (Perkins &amp; Roe): era post-plagiarism — il design delle prove batte la sorveglianza</a:t>
+            </a:r>
+            <a:endParaRPr lang="en-US" sz="1500" dirty="0"/>
+          </a:p>
+          <a:p>
+            <a:pPr marL="177800" indent="-177800">
+              <a:spcAft>
+                <a:spcPts val="800"/>
+              </a:spcAft>
+              <a:buSzPct val="100000"/>
+              <a:buChar char="•"/>
+            </a:pPr>
+            <a:r>
+              <a:rPr lang="en-US" sz="1500" dirty="0">
+                <a:solidFill>
+                  <a:srgbClr val="26303B"/>
+                </a:solidFill>
+                <a:latin typeface="Calibri" pitchFamily="34" charset="0"/>
+                <a:ea typeface="Calibri" pitchFamily="34" charset="-122"/>
+                <a:cs typeface="Calibri" pitchFamily="34" charset="-120"/>
+              </a:rPr>
+              <a:t>UNESCO — MOOC Digital Citizenship (2ª ed.): il modulo su algoritmi e disinformazione è il gemello internazionale di questo incontro</a:t>
+            </a:r>
+            <a:endParaRPr lang="en-US" sz="1500" dirty="0"/>
+          </a:p>
+        </p:txBody>
+      </p:sp>
+      <p:sp>
+        <p:nvSpPr>
+          <p:cNvPr id="7" name="Shape 5"/>
+          <p:cNvSpPr/>
+          <p:nvPr/>
+        </p:nvSpPr>
+        <p:spPr>
+          <a:xfrm>
+            <a:off x="7635240" y="1600200"/>
+            <a:ext cx="3977640" cy="4480560"/>
+          </a:xfrm>
+          <a:prstGeom prst="roundRect">
+            <a:avLst>
+              <a:gd name="adj" fmla="val 2069"/>
+            </a:avLst>
+          </a:prstGeom>
+          <a:solidFill>
+            <a:srgbClr val="E9F1FB"/>
+          </a:solidFill>
+          <a:ln w="12700">
+            <a:solidFill>
+              <a:srgbClr val="E9F1FB"/>
+            </a:solidFill>
+            <a:prstDash val="solid"/>
+          </a:ln>
+        </p:spPr>
+      </p:sp>
+      <p:sp>
+        <p:nvSpPr>
+          <p:cNvPr id="8" name="Text 6"/>
+          <p:cNvSpPr/>
+          <p:nvPr/>
+        </p:nvSpPr>
+        <p:spPr>
+          <a:xfrm>
+            <a:off x="7863840" y="1764792"/>
+            <a:ext cx="3520440" cy="320040"/>
+          </a:xfrm>
+          <a:prstGeom prst="rect">
+            <a:avLst/>
+          </a:prstGeom>
+          <a:noFill/>
+          <a:ln/>
+        </p:spPr>
+        <p:txBody>
+          <a:bodyPr wrap="square" lIns="0" tIns="0" rIns="0" bIns="0" rtlCol="0" anchor="ctr"/>
+          <a:lstStyle/>
+          <a:p>
+            <a:pPr indent="0" marL="0">
+              <a:buNone/>
+            </a:pPr>
+            <a:r>
+              <a:rPr lang="en-US" sz="1450" b="1" dirty="0">
+                <a:solidFill>
+                  <a:srgbClr val="1E2761"/>
+                </a:solidFill>
+                <a:latin typeface="Cambria" pitchFamily="34" charset="0"/>
+                <a:ea typeface="Cambria" pitchFamily="34" charset="-122"/>
+                <a:cs typeface="Cambria" pitchFamily="34" charset="-120"/>
+              </a:rPr>
+              <a:t>In una frase</a:t>
+            </a:r>
+            <a:endParaRPr lang="en-US" sz="1450" dirty="0"/>
+          </a:p>
+        </p:txBody>
+      </p:sp>
+      <p:sp>
+        <p:nvSpPr>
+          <p:cNvPr id="9" name="Text 7"/>
+          <p:cNvSpPr/>
+          <p:nvPr/>
+        </p:nvSpPr>
+        <p:spPr>
+          <a:xfrm>
+            <a:off x="7863840" y="2130552"/>
+            <a:ext cx="3520440" cy="3794760"/>
+          </a:xfrm>
+          <a:prstGeom prst="rect">
+            <a:avLst/>
+          </a:prstGeom>
+          <a:noFill/>
+          <a:ln/>
+        </p:spPr>
+        <p:txBody>
+          <a:bodyPr wrap="square" lIns="0" tIns="0" rIns="0" bIns="0" rtlCol="0" anchor="t"/>
+          <a:lstStyle/>
+          <a:p>
+            <a:pPr indent="0" marL="0">
+              <a:spcAft>
+                <a:spcPts val="500"/>
+              </a:spcAft>
+              <a:buNone/>
+            </a:pPr>
+            <a:r>
+              <a:rPr lang="en-US" sz="1250" b="1" dirty="0">
+                <a:solidFill>
+                  <a:srgbClr val="26303B"/>
+                </a:solidFill>
+                <a:latin typeface="Calibri" pitchFamily="34" charset="0"/>
+                <a:ea typeface="Calibri" pitchFamily="34" charset="-122"/>
+                <a:cs typeface="Calibri" pitchFamily="34" charset="-120"/>
+              </a:rPr>
+              <a:t>Interrogare i sistemi con metodo è la forma 2026 del pensiero critico</a:t>
+            </a:r>
+            <a:endParaRPr lang="en-US" sz="1250" dirty="0"/>
+          </a:p>
+          <a:p>
+            <a:pPr indent="0" marL="0">
+              <a:spcAft>
+                <a:spcPts val="500"/>
+              </a:spcAft>
+              <a:buNone/>
+            </a:pPr>
+            <a:r>
+              <a:rPr lang="en-US" sz="1250" dirty="0">
+                <a:solidFill>
+                  <a:srgbClr val="26303B"/>
+                </a:solidFill>
+                <a:latin typeface="Calibri" pitchFamily="34" charset="0"/>
+                <a:ea typeface="Calibri" pitchFamily="34" charset="-122"/>
+                <a:cs typeface="Calibri" pitchFamily="34" charset="-120"/>
+              </a:rPr>
+              <a:t>E si insegna facendola, non raccontandola</a:t>
+            </a:r>
+            <a:endParaRPr lang="en-US" sz="1250" dirty="0"/>
+          </a:p>
+        </p:txBody>
+      </p:sp>
+    </p:spTree>
+  </p:cSld>
+  <p:clrMapOvr>
+    <a:masterClrMapping/>
+  </p:clrMapOvr>
+</p:sld>
+</file>
+
+<file path=ppt/slides/slide9.xml><?xml version="1.0" encoding="utf-8"?>
+<p:sld xmlns:a="http://schemas.openxmlformats.org/drawingml/2006/main" xmlns:r="http://schemas.openxmlformats.org/officeDocument/2006/relationships" xmlns:p="http://schemas.openxmlformats.org/presentationml/2006/main">
+  <p:cSld name="Slide 9">
     <p:bg>
       <p:bgPr>
         <a:solidFill>
